--- a/assets/pptx/catalog-131.pptx
+++ b/assets/pptx/catalog-131.pptx
@@ -3298,7 +3298,7 @@
                 <a:ea typeface="Ebrima"/>
                 <a:cs typeface="Ebrima"/>
               </a:rPr>
-              <a:t>በከበረው መንፈስ ሂወቴን ቃኝተሀል (2)</a:t>
+              <a:t>በከበረው መንፈስ ሂወቴን ቃኝተሀል 2</a:t>
             </a:r>
           </a:p>
           <a:p>
@@ -3316,7 +3316,7 @@
                 <a:ea typeface="Ebrima"/>
                 <a:cs typeface="Ebrima"/>
               </a:rPr>
-              <a:t>ሂወቴን ቃኝተሀል ሂወቴን(4)</a:t>
+              <a:t>ሂወቴን ቃኝተሀል ሂወቴን4</a:t>
             </a:r>
           </a:p>
           <a:p>
@@ -3334,7 +3334,7 @@
                 <a:ea typeface="Ebrima"/>
                 <a:cs typeface="Ebrima"/>
               </a:rPr>
-              <a:t>ሂወቴን ቃኝተሀል ሂወቴን (4)</a:t>
+              <a:t>ሂወቴን ቃኝተሀል ሂወቴን 4</a:t>
             </a:r>
           </a:p>
         </p:txBody>
@@ -3455,7 +3455,7 @@
                 <a:ea typeface="Ebrima"/>
                 <a:cs typeface="Ebrima"/>
               </a:rPr>
-              <a:t>በእየሱሴ ሞት ጸድቀሻል ተባልኩኝ (2)</a:t>
+              <a:t>በእየሱሴ ሞት ጸድቀሻል ተባልኩኝ 2</a:t>
             </a:r>
           </a:p>
           <a:p>
@@ -3473,7 +3473,7 @@
                 <a:ea typeface="Ebrima"/>
                 <a:cs typeface="Ebrima"/>
               </a:rPr>
-              <a:t>ሂወቴን ቃኝተሀል ሂወቴን(4)</a:t>
+              <a:t>ሂወቴን ቃኝተሀል ሂወቴን4</a:t>
             </a:r>
           </a:p>
           <a:p>
@@ -3491,7 +3491,7 @@
                 <a:ea typeface="Ebrima"/>
                 <a:cs typeface="Ebrima"/>
               </a:rPr>
-              <a:t>ሂወቴን ቃኝተሀል ሂወቴን (4)</a:t>
+              <a:t>ሂወቴን ቃኝተሀል ሂወቴን 4</a:t>
             </a:r>
           </a:p>
         </p:txBody>
@@ -3612,7 +3612,7 @@
                 <a:ea typeface="Ebrima"/>
                 <a:cs typeface="Ebrima"/>
               </a:rPr>
-              <a:t>በከበረው መንፈስ ሂወቴን ቃኝተሀል (2)</a:t>
+              <a:t>በከበረው መንፈስ ሂወቴን ቃኝተሀል 2</a:t>
             </a:r>
           </a:p>
           <a:p>
@@ -3630,7 +3630,7 @@
                 <a:ea typeface="Ebrima"/>
                 <a:cs typeface="Ebrima"/>
               </a:rPr>
-              <a:t>ሂወቴን ቃኝተሀል ሂወቴን(4)</a:t>
+              <a:t>ሂወቴን ቃኝተሀል ሂወቴን4</a:t>
             </a:r>
           </a:p>
           <a:p>
@@ -3648,7 +3648,7 @@
                 <a:ea typeface="Ebrima"/>
                 <a:cs typeface="Ebrima"/>
               </a:rPr>
-              <a:t>ሂወቴን ቃኝተሀል ሂወቴን (4)</a:t>
+              <a:t>ሂወቴን ቃኝተሀል ሂወቴን 4</a:t>
             </a:r>
           </a:p>
         </p:txBody>
@@ -3769,7 +3769,7 @@
                 <a:ea typeface="Ebrima"/>
                 <a:cs typeface="Ebrima"/>
               </a:rPr>
-              <a:t>በእየሱሴ ሞት ጸድቀሻል ተባልኩኝ (2)</a:t>
+              <a:t>በእየሱሴ ሞት ጸድቀሻል ተባልኩኝ 2</a:t>
             </a:r>
           </a:p>
           <a:p>
@@ -3787,7 +3787,7 @@
                 <a:ea typeface="Ebrima"/>
                 <a:cs typeface="Ebrima"/>
               </a:rPr>
-              <a:t>ሂወቴን ቃኝተሀል ሂወቴን (4)</a:t>
+              <a:t>ሂወቴን ቃኝተሀል ሂወቴን 4</a:t>
             </a:r>
           </a:p>
         </p:txBody>
